--- a/apps/resources/bundled_files/5-klass-ylldamdyk-sabak.pptx
+++ b/apps/resources/bundled_files/5-klass-ylldamdyk-sabak.pptx
@@ -5196,7 +5196,7 @@
                 </a:solidFill>
                 <a:latin typeface="PT Sans"/>
               </a:rPr>
-              <a:t>5-класс · Математика</a:t>
+              <a:t/>
             </a:r>
           </a:p>
         </p:txBody>
@@ -5688,7 +5688,7 @@
                 </a:solidFill>
                 <a:latin typeface="PT Sans"/>
               </a:rPr>
-              <a:t>5-класс ›</a:t>
+              <a:t/>
             </a:r>
           </a:p>
           <a:p>
@@ -6637,7 +6637,7 @@
                 </a:solidFill>
                 <a:latin typeface="PT Sans"/>
               </a:rPr>
-              <a:t>5-класс ›</a:t>
+              <a:t/>
             </a:r>
           </a:p>
           <a:p>
@@ -9444,7 +9444,7 @@
                 </a:solidFill>
                 <a:latin typeface="PT Sans"/>
               </a:rPr>
-              <a:t>5-класс ›</a:t>
+              <a:t/>
             </a:r>
           </a:p>
           <a:p>
@@ -12580,7 +12580,7 @@
                 </a:solidFill>
                 <a:latin typeface="PT Sans"/>
               </a:rPr>
-              <a:t>5-класс ›</a:t>
+              <a:t/>
             </a:r>
           </a:p>
           <a:p>
@@ -14163,7 +14163,7 @@
                 </a:solidFill>
                 <a:latin typeface="PT Sans"/>
               </a:rPr>
-              <a:t>5-класс ›</a:t>
+              <a:t/>
             </a:r>
           </a:p>
           <a:p>
@@ -14875,7 +14875,7 @@
                 </a:solidFill>
                 <a:latin typeface="PT Sans"/>
               </a:rPr>
-              <a:t>5-класс ›</a:t>
+              <a:t/>
             </a:r>
           </a:p>
           <a:p>
@@ -15626,7 +15626,7 @@
                 </a:solidFill>
                 <a:latin typeface="PT Sans"/>
               </a:rPr>
-              <a:t>5-класс ›</a:t>
+              <a:t/>
             </a:r>
           </a:p>
           <a:p>
@@ -17175,7 +17175,7 @@
                 </a:solidFill>
                 <a:latin typeface="PT Sans"/>
               </a:rPr>
-              <a:t>5-класс ›</a:t>
+              <a:t/>
             </a:r>
           </a:p>
           <a:p>
@@ -18259,7 +18259,7 @@
                 </a:solidFill>
                 <a:latin typeface="PT Sans"/>
               </a:rPr>
-              <a:t>5-класс ›</a:t>
+              <a:t/>
             </a:r>
           </a:p>
           <a:p>
@@ -19789,7 +19789,7 @@
                 </a:solidFill>
                 <a:latin typeface="PT Sans"/>
               </a:rPr>
-              <a:t>5-класс ›</a:t>
+              <a:t/>
             </a:r>
           </a:p>
           <a:p>
@@ -21745,7 +21745,7 @@
                 </a:solidFill>
                 <a:latin typeface="PT Sans"/>
               </a:rPr>
-              <a:t>5-класс ›</a:t>
+              <a:t/>
             </a:r>
           </a:p>
           <a:p>
@@ -23022,7 +23022,7 @@
                 </a:solidFill>
                 <a:latin typeface="PT Sans"/>
               </a:rPr>
-              <a:t>5-класс ›</a:t>
+              <a:t/>
             </a:r>
           </a:p>
           <a:p>
@@ -24450,7 +24450,7 @@
                 </a:solidFill>
                 <a:latin typeface="PT Sans"/>
               </a:rPr>
-              <a:t>5-класс ›</a:t>
+              <a:t/>
             </a:r>
           </a:p>
           <a:p>
@@ -25906,7 +25906,7 @@
                 </a:solidFill>
                 <a:latin typeface="PT Sans"/>
               </a:rPr>
-              <a:t>5-класс ›</a:t>
+              <a:t/>
             </a:r>
           </a:p>
           <a:p>
@@ -27179,7 +27179,7 @@
                 </a:solidFill>
                 <a:latin typeface="PT Sans"/>
               </a:rPr>
-              <a:t>5-класс ›</a:t>
+              <a:t/>
             </a:r>
           </a:p>
           <a:p>
@@ -27979,7 +27979,7 @@
                 </a:solidFill>
                 <a:latin typeface="PT Sans"/>
               </a:rPr>
-              <a:t>5-класс ›</a:t>
+              <a:t/>
             </a:r>
           </a:p>
           <a:p>
@@ -28820,7 +28820,7 @@
                 </a:solidFill>
                 <a:latin typeface="PT Sans"/>
               </a:rPr>
-              <a:t>5-класс ›</a:t>
+              <a:t/>
             </a:r>
           </a:p>
           <a:p>
@@ -29769,7 +29769,7 @@
                 </a:solidFill>
                 <a:latin typeface="PT Sans"/>
               </a:rPr>
-              <a:t>5-класс ›</a:t>
+              <a:t/>
             </a:r>
           </a:p>
           <a:p>
@@ -31223,7 +31223,7 @@
                 </a:solidFill>
                 <a:latin typeface="PT Sans"/>
               </a:rPr>
-              <a:t>5-класс ›</a:t>
+              <a:t/>
             </a:r>
           </a:p>
           <a:p>
@@ -31969,7 +31969,7 @@
                 </a:solidFill>
                 <a:latin typeface="PT Sans"/>
               </a:rPr>
-              <a:t>5-класс ›</a:t>
+              <a:t/>
             </a:r>
           </a:p>
           <a:p>
@@ -32777,7 +32777,7 @@
                 </a:solidFill>
                 <a:latin typeface="PT Sans"/>
               </a:rPr>
-              <a:t>5-класс ›</a:t>
+              <a:t/>
             </a:r>
           </a:p>
           <a:p>
@@ -33968,7 +33968,7 @@
                 </a:solidFill>
                 <a:latin typeface="PT Sans"/>
               </a:rPr>
-              <a:t>5-класс ›</a:t>
+              <a:t/>
             </a:r>
           </a:p>
           <a:p>
@@ -35147,7 +35147,7 @@
                 </a:solidFill>
                 <a:latin typeface="PT Sans"/>
               </a:rPr>
-              <a:t>5-класс ›</a:t>
+              <a:t/>
             </a:r>
           </a:p>
           <a:p>
@@ -35328,7 +35328,7 @@
                 </a:solidFill>
                 <a:latin typeface="PT Sans"/>
               </a:rPr>
-              <a:t>4-класс</a:t>
+              <a:t/>
             </a:r>
           </a:p>
         </p:txBody>
@@ -35508,7 +35508,7 @@
                 </a:solidFill>
                 <a:latin typeface="PT Sans"/>
               </a:rPr>
-              <a:t>5-класс</a:t>
+              <a:t/>
             </a:r>
           </a:p>
         </p:txBody>
@@ -35744,7 +35744,7 @@
                 </a:solidFill>
                 <a:latin typeface="PT Sans"/>
               </a:rPr>
-              <a:t>6-класс</a:t>
+              <a:t/>
             </a:r>
           </a:p>
         </p:txBody>
@@ -35925,7 +35925,7 @@
                 </a:solidFill>
                 <a:latin typeface="PT Sans"/>
               </a:rPr>
-              <a:t>7-класс</a:t>
+              <a:t/>
             </a:r>
           </a:p>
         </p:txBody>
@@ -36345,7 +36345,7 @@
                 </a:solidFill>
                 <a:latin typeface="PT Sans"/>
               </a:rPr>
-              <a:t>5-класс ›</a:t>
+              <a:t/>
             </a:r>
           </a:p>
           <a:p>
@@ -37493,7 +37493,7 @@
                 </a:solidFill>
                 <a:latin typeface="PT Sans"/>
               </a:rPr>
-              <a:t>5-класс ›</a:t>
+              <a:t/>
             </a:r>
           </a:p>
           <a:p>

--- a/apps/resources/bundled_files/5-klass-ylldamdyk-sabak.pptx
+++ b/apps/resources/bundled_files/5-klass-ylldamdyk-sabak.pptx
@@ -1582,7 +1582,7 @@
           <a:lstStyle/>
           <a:p>
             <a:r>
-              <a:t>Ой жүгүртүү маданияты (Wenxi Lee, 2.6).</a:t>
+              <a:t>Ой жүгүртүү маданияты (Wenxi Lee, 2,6).</a:t>
             </a:r>
           </a:p>
         </p:txBody>
